--- a/assets/powerpoints/module-n1-orientation/B1-le-mot-sur-la-porte.pptx
+++ b/assets/powerpoints/module-n1-orientation/B1-le-mot-sur-la-porte.pptx
@@ -11235,13 +11235,22 @@
               </a:lnSpc>
             </a:pPr>
             <a:r>
+              <a:rPr sz="2000" b="1" i="0">
+                <a:solidFill>
+                  <a:srgbClr val="4B4F52"/>
+                </a:solidFill>
+                <a:latin typeface="Verdana"/>
+              </a:rPr>
+              <a:t>ca — fé — té — ria</a:t>
+            </a:r>
+            <a:r>
               <a:rPr sz="2000" b="0" i="0">
                 <a:solidFill>
                   <a:srgbClr val="4B4F52"/>
                 </a:solidFill>
                 <a:latin typeface="Verdana"/>
               </a:rPr>
-              <a:t>&lt;b&gt;ca — fé — té — ria&lt;/b&gt;. On lit chaque morceau, puis on les remet ensemble. Personne ne lit un mot long d'un seul coup au début, et beaucoup de gens nés ici font pareil devant un mot qu'ils ne connaissent pas.</a:t>
+              <a:t>. On lit chaque morceau, puis on les remet ensemble. Personne ne lit un mot long d'un seul coup au début, et beaucoup de gens nés ici font pareil devant un mot qu'ils ne connaissent pas.</a:t>
             </a:r>
           </a:p>
         </p:txBody>
